--- a/slide/themes/src/21_gradient echo.pptx
+++ b/slide/themes/src/21_gradient echo.pptx
@@ -8803,9 +8803,6 @@
                     <a:lumMod val="50000"/>
                   </a:schemeClr>
                 </a:solidFill>
-                <a:latin typeface="Arial Black"/>
-                <a:ea typeface="Arial Black"/>
-                <a:cs typeface="Arial Black"/>
               </a:defRPr>
             </a:lvl1pPr>
             <a:lvl2pPr algn="l">
@@ -8815,9 +8812,6 @@
                     <a:lumMod val="50000"/>
                   </a:schemeClr>
                 </a:solidFill>
-                <a:latin typeface="Arial Black"/>
-                <a:ea typeface="Arial Black"/>
-                <a:cs typeface="Arial Black"/>
               </a:defRPr>
             </a:lvl2pPr>
             <a:lvl3pPr algn="l">
@@ -8827,9 +8821,6 @@
                     <a:lumMod val="50000"/>
                   </a:schemeClr>
                 </a:solidFill>
-                <a:latin typeface="Arial Black"/>
-                <a:ea typeface="Arial Black"/>
-                <a:cs typeface="Arial Black"/>
               </a:defRPr>
             </a:lvl3pPr>
             <a:lvl4pPr algn="l">
@@ -8839,9 +8830,6 @@
                     <a:lumMod val="50000"/>
                   </a:schemeClr>
                 </a:solidFill>
-                <a:latin typeface="Arial Black"/>
-                <a:ea typeface="Arial Black"/>
-                <a:cs typeface="Arial Black"/>
               </a:defRPr>
             </a:lvl4pPr>
             <a:lvl5pPr algn="l">
@@ -8851,9 +8839,6 @@
                     <a:lumMod val="50000"/>
                   </a:schemeClr>
                 </a:solidFill>
-                <a:latin typeface="Arial Black"/>
-                <a:ea typeface="Arial Black"/>
-                <a:cs typeface="Arial Black"/>
               </a:defRPr>
             </a:lvl5pPr>
             <a:lvl6pPr algn="l">
@@ -8863,9 +8848,6 @@
                     <a:lumMod val="50000"/>
                   </a:schemeClr>
                 </a:solidFill>
-                <a:latin typeface="Arial Black"/>
-                <a:ea typeface="Arial Black"/>
-                <a:cs typeface="Arial Black"/>
               </a:defRPr>
             </a:lvl6pPr>
             <a:lvl7pPr algn="l">
@@ -8875,9 +8857,6 @@
                     <a:lumMod val="50000"/>
                   </a:schemeClr>
                 </a:solidFill>
-                <a:latin typeface="Arial Black"/>
-                <a:ea typeface="Arial Black"/>
-                <a:cs typeface="Arial Black"/>
               </a:defRPr>
             </a:lvl7pPr>
             <a:lvl8pPr algn="l">
@@ -8887,9 +8866,6 @@
                     <a:lumMod val="50000"/>
                   </a:schemeClr>
                 </a:solidFill>
-                <a:latin typeface="Arial Black"/>
-                <a:ea typeface="Arial Black"/>
-                <a:cs typeface="Arial Black"/>
               </a:defRPr>
             </a:lvl8pPr>
             <a:lvl9pPr algn="l">
@@ -8899,9 +8875,6 @@
                     <a:lumMod val="50000"/>
                   </a:schemeClr>
                 </a:solidFill>
-                <a:latin typeface="Arial Black"/>
-                <a:ea typeface="Arial Black"/>
-                <a:cs typeface="Arial Black"/>
               </a:defRPr>
             </a:lvl9pPr>
           </a:lstStyle>
@@ -9347,13 +9320,13 @@
     </a:clrScheme>
     <a:fontScheme name="Office Theme">
       <a:majorFont>
-        <a:latin typeface="Arial"/>
-        <a:ea typeface="SimSun"/>
+        <a:latin typeface="Arial Black"/>
+        <a:ea typeface="SimHei"/>
         <a:cs typeface="Arial"/>
       </a:majorFont>
       <a:minorFont>
         <a:latin typeface="Arial"/>
-        <a:ea typeface="SimSun"/>
+        <a:ea typeface="Microsoft YaHei"/>
         <a:cs typeface="Arial"/>
       </a:minorFont>
     </a:fontScheme>
@@ -9584,13 +9557,13 @@
     </a:clrScheme>
     <a:fontScheme name="Arial">
       <a:majorFont>
-        <a:latin typeface="Arial"/>
-        <a:ea typeface="Arial"/>
+        <a:latin typeface="Arial Black"/>
+        <a:ea typeface="SimHei"/>
         <a:cs typeface="Arial"/>
       </a:majorFont>
       <a:minorFont>
         <a:latin typeface="Arial"/>
-        <a:ea typeface="Arial"/>
+        <a:ea typeface="Microsoft YaHei"/>
         <a:cs typeface="Arial"/>
       </a:minorFont>
     </a:fontScheme>

--- a/slide/themes/src/21_gradient echo.pptx
+++ b/slide/themes/src/21_gradient echo.pptx
@@ -536,10 +536,7 @@
             <a:pPr>
               <a:defRPr/>
             </a:pPr>
-            <a:endParaRPr lang="en-US">
-              <a:latin typeface="Arial"/>
-              <a:cs typeface="Arial"/>
-            </a:endParaRPr>
+            <a:endParaRPr lang="en-US"/>
           </a:p>
         </p:txBody>
       </p:sp>
